--- a/docs/RemitFlow_PitchDeck_2026-06-25.pptx
+++ b/docs/RemitFlow_PitchDeck_2026-06-25.pptx
@@ -2273,7 +2273,7 @@
                   <a:srgbClr val="E2E8F0"/>
                 </a:solidFill>
               </a:rPr>
-              <a:t>Live Demo: remitflow.vercel.app</a:t>
+              <a:t>Live Demo: remitflow-level5.vercel.app</a:t>
             </a:r>
             <a:endParaRPr lang="en-US" sz="2400" dirty="0"/>
           </a:p>
